--- a/assets/pptx/catalog-435.pptx
+++ b/assets/pptx/catalog-435.pptx
@@ -3243,7 +3243,7 @@
                 <a:ea typeface="Ebrima"/>
                 <a:cs typeface="Ebrima"/>
               </a:rPr>
-              <a:t>In your presence (3X)</a:t>
+              <a:t>In your presence 3X</a:t>
             </a:r>
           </a:p>
           <a:p>
@@ -3279,7 +3279,7 @@
                 <a:ea typeface="Ebrima"/>
                 <a:cs typeface="Ebrima"/>
               </a:rPr>
-              <a:t>In your presence (3X)</a:t>
+              <a:t>In your presence 3X</a:t>
             </a:r>
           </a:p>
           <a:p>
@@ -3333,7 +3333,7 @@
                 <a:ea typeface="Ebrima"/>
                 <a:cs typeface="Ebrima"/>
               </a:rPr>
-              <a:t>Stay here forever in your beautiful embrace (3x)</a:t>
+              <a:t>Stay here forever in your beautiful embrace 3x</a:t>
             </a:r>
           </a:p>
           <a:p>
@@ -3351,7 +3351,7 @@
                 <a:ea typeface="Ebrima"/>
                 <a:cs typeface="Ebrima"/>
               </a:rPr>
-              <a:t>The heavens are open (3x)</a:t>
+              <a:t>The heavens are open 3x</a:t>
             </a:r>
           </a:p>
           <a:p>
@@ -3603,7 +3603,7 @@
                 <a:ea typeface="Ebrima"/>
                 <a:cs typeface="Ebrima"/>
               </a:rPr>
-              <a:t>The heavens are open(3x)</a:t>
+              <a:t>The heavens are open3x</a:t>
             </a:r>
           </a:p>
           <a:p>
@@ -3639,7 +3639,7 @@
                 <a:ea typeface="Ebrima"/>
                 <a:cs typeface="Ebrima"/>
               </a:rPr>
-              <a:t>I choose you(6x)</a:t>
+              <a:t>I choose you6x</a:t>
             </a:r>
           </a:p>
           <a:p>
@@ -3657,7 +3657,7 @@
                 <a:ea typeface="Ebrima"/>
                 <a:cs typeface="Ebrima"/>
               </a:rPr>
-              <a:t>Only you (6X)</a:t>
+              <a:t>Only you 6X</a:t>
             </a:r>
           </a:p>
         </p:txBody>
@@ -3917,7 +3917,7 @@
                 <a:ea typeface="Ebrima"/>
                 <a:cs typeface="Ebrima"/>
               </a:rPr>
-              <a:t>To your presence (2X)</a:t>
+              <a:t>To your presence 2X</a:t>
             </a:r>
           </a:p>
           <a:p>
